--- a/Dart-ChromeExtension.pptx
+++ b/Dart-ChromeExtension.pptx
@@ -334,7 +334,7 @@
             <a:fld id="{B61BEF0D-F0BB-DE4B-95CE-6DB70DBA9567}" type="datetimeFigureOut">
               <a:rPr lang="en-US" dirty="0"/>
               <a:pPr/>
-              <a:t>6/2/2021</a:t>
+              <a:t>8/25/2021</a:t>
             </a:fld>
             <a:endParaRPr lang="en-US" dirty="0"/>
           </a:p>
@@ -622,7 +622,7 @@
             <a:fld id="{B61BEF0D-F0BB-DE4B-95CE-6DB70DBA9567}" type="datetimeFigureOut">
               <a:rPr lang="en-US" dirty="0"/>
               <a:pPr/>
-              <a:t>6/2/2021</a:t>
+              <a:t>8/25/2021</a:t>
             </a:fld>
             <a:endParaRPr lang="en-US" dirty="0"/>
           </a:p>
@@ -867,7 +867,7 @@
             <a:fld id="{B61BEF0D-F0BB-DE4B-95CE-6DB70DBA9567}" type="datetimeFigureOut">
               <a:rPr lang="en-US" dirty="0"/>
               <a:pPr/>
-              <a:t>6/2/2021</a:t>
+              <a:t>8/25/2021</a:t>
             </a:fld>
             <a:endParaRPr lang="en-US" dirty="0"/>
           </a:p>
@@ -1400,7 +1400,7 @@
             <a:fld id="{B61BEF0D-F0BB-DE4B-95CE-6DB70DBA9567}" type="datetimeFigureOut">
               <a:rPr lang="en-US" dirty="0"/>
               <a:pPr/>
-              <a:t>6/2/2021</a:t>
+              <a:t>8/25/2021</a:t>
             </a:fld>
             <a:endParaRPr lang="en-US" dirty="0"/>
           </a:p>
@@ -1645,7 +1645,7 @@
             <a:fld id="{B61BEF0D-F0BB-DE4B-95CE-6DB70DBA9567}" type="datetimeFigureOut">
               <a:rPr lang="en-US" dirty="0"/>
               <a:pPr/>
-              <a:t>6/2/2021</a:t>
+              <a:t>8/25/2021</a:t>
             </a:fld>
             <a:endParaRPr lang="en-US" dirty="0"/>
           </a:p>
@@ -2185,7 +2185,7 @@
             <a:fld id="{B61BEF0D-F0BB-DE4B-95CE-6DB70DBA9567}" type="datetimeFigureOut">
               <a:rPr lang="en-US" dirty="0"/>
               <a:pPr/>
-              <a:t>6/2/2021</a:t>
+              <a:t>8/25/2021</a:t>
             </a:fld>
             <a:endParaRPr lang="en-US" dirty="0"/>
           </a:p>
@@ -2492,7 +2492,7 @@
             <a:fld id="{B61BEF0D-F0BB-DE4B-95CE-6DB70DBA9567}" type="datetimeFigureOut">
               <a:rPr lang="en-US" dirty="0"/>
               <a:pPr/>
-              <a:t>6/2/2021</a:t>
+              <a:t>8/25/2021</a:t>
             </a:fld>
             <a:endParaRPr lang="en-US" dirty="0"/>
           </a:p>
@@ -2664,7 +2664,7 @@
             <a:fld id="{B61BEF0D-F0BB-DE4B-95CE-6DB70DBA9567}" type="datetimeFigureOut">
               <a:rPr lang="en-US" dirty="0"/>
               <a:pPr/>
-              <a:t>6/2/2021</a:t>
+              <a:t>8/25/2021</a:t>
             </a:fld>
             <a:endParaRPr lang="en-US" dirty="0"/>
           </a:p>
@@ -2841,7 +2841,7 @@
             <a:fld id="{B61BEF0D-F0BB-DE4B-95CE-6DB70DBA9567}" type="datetimeFigureOut">
               <a:rPr lang="en-US" dirty="0"/>
               <a:pPr/>
-              <a:t>6/2/2021</a:t>
+              <a:t>8/25/2021</a:t>
             </a:fld>
             <a:endParaRPr lang="en-US" dirty="0"/>
           </a:p>
@@ -3008,7 +3008,7 @@
             <a:fld id="{B61BEF0D-F0BB-DE4B-95CE-6DB70DBA9567}" type="datetimeFigureOut">
               <a:rPr lang="en-US" dirty="0"/>
               <a:pPr/>
-              <a:t>6/2/2021</a:t>
+              <a:t>8/25/2021</a:t>
             </a:fld>
             <a:endParaRPr lang="en-US" dirty="0"/>
           </a:p>
@@ -3251,7 +3251,7 @@
             <a:fld id="{B61BEF0D-F0BB-DE4B-95CE-6DB70DBA9567}" type="datetimeFigureOut">
               <a:rPr lang="en-US" dirty="0"/>
               <a:pPr/>
-              <a:t>6/2/2021</a:t>
+              <a:t>8/25/2021</a:t>
             </a:fld>
             <a:endParaRPr lang="en-US" dirty="0"/>
           </a:p>
@@ -3540,7 +3540,7 @@
             <a:fld id="{B61BEF0D-F0BB-DE4B-95CE-6DB70DBA9567}" type="datetimeFigureOut">
               <a:rPr lang="en-US" dirty="0"/>
               <a:pPr/>
-              <a:t>6/2/2021</a:t>
+              <a:t>8/25/2021</a:t>
             </a:fld>
             <a:endParaRPr lang="en-US" dirty="0"/>
           </a:p>
@@ -3967,7 +3967,7 @@
             <a:fld id="{B61BEF0D-F0BB-DE4B-95CE-6DB70DBA9567}" type="datetimeFigureOut">
               <a:rPr lang="en-US" dirty="0"/>
               <a:pPr/>
-              <a:t>6/2/2021</a:t>
+              <a:t>8/25/2021</a:t>
             </a:fld>
             <a:endParaRPr lang="en-US" dirty="0"/>
           </a:p>
@@ -4087,7 +4087,7 @@
             <a:fld id="{B61BEF0D-F0BB-DE4B-95CE-6DB70DBA9567}" type="datetimeFigureOut">
               <a:rPr lang="en-US" dirty="0"/>
               <a:pPr/>
-              <a:t>6/2/2021</a:t>
+              <a:t>8/25/2021</a:t>
             </a:fld>
             <a:endParaRPr lang="en-US" dirty="0"/>
           </a:p>
@@ -4179,7 +4179,7 @@
             <a:fld id="{B61BEF0D-F0BB-DE4B-95CE-6DB70DBA9567}" type="datetimeFigureOut">
               <a:rPr lang="en-US" dirty="0"/>
               <a:pPr/>
-              <a:t>6/2/2021</a:t>
+              <a:t>8/25/2021</a:t>
             </a:fld>
             <a:endParaRPr lang="en-US" dirty="0"/>
           </a:p>
@@ -4459,7 +4459,7 @@
             <a:fld id="{B61BEF0D-F0BB-DE4B-95CE-6DB70DBA9567}" type="datetimeFigureOut">
               <a:rPr lang="en-US" dirty="0"/>
               <a:pPr/>
-              <a:t>6/2/2021</a:t>
+              <a:t>8/25/2021</a:t>
             </a:fld>
             <a:endParaRPr lang="en-US" dirty="0"/>
           </a:p>
@@ -4747,7 +4747,7 @@
             <a:fld id="{B61BEF0D-F0BB-DE4B-95CE-6DB70DBA9567}" type="datetimeFigureOut">
               <a:rPr lang="en-US" dirty="0"/>
               <a:pPr/>
-              <a:t>6/2/2021</a:t>
+              <a:t>8/25/2021</a:t>
             </a:fld>
             <a:endParaRPr lang="en-US" dirty="0"/>
           </a:p>
@@ -4975,7 +4975,7 @@
             <a:fld id="{B61BEF0D-F0BB-DE4B-95CE-6DB70DBA9567}" type="datetimeFigureOut">
               <a:rPr lang="en-US" dirty="0"/>
               <a:pPr/>
-              <a:t>6/2/2021</a:t>
+              <a:t>8/25/2021</a:t>
             </a:fld>
             <a:endParaRPr lang="en-US" dirty="0"/>
           </a:p>
@@ -5959,7 +5959,7 @@
           <a:p>
             <a:r>
               <a:rPr lang="en-US" dirty="0"/>
-              <a:t>Libraries</a:t>
+              <a:t>Packages</a:t>
             </a:r>
             <a:endParaRPr lang="en-BE" dirty="0"/>
           </a:p>
@@ -6057,9 +6057,20 @@
           <a:p>
             <a:r>
               <a:rPr lang="en-US" dirty="0" err="1"/>
+              <a:t>Dart:Core</a:t>
+            </a:r>
+            <a:r>
+              <a:rPr lang="en-US" dirty="0"/>
+              <a:t> &amp; </a:t>
+            </a:r>
+            <a:r>
+              <a:rPr lang="en-US" dirty="0" err="1"/>
               <a:t>Dart:Html</a:t>
             </a:r>
-            <a:endParaRPr lang="en-US" dirty="0"/>
+            <a:r>
+              <a:rPr lang="en-US" dirty="0"/>
+              <a:t> - Examples</a:t>
+            </a:r>
           </a:p>
         </p:txBody>
       </p:sp>
@@ -6182,16 +6193,12 @@
               <a:t>css</a:t>
             </a:r>
             <a:r>
+              <a:rPr lang="en-US"/>
+              <a:t> selector</a:t>
+            </a:r>
+            <a:r>
               <a:rPr lang="en-US" dirty="0"/>
-              <a:t> </a:t>
-            </a:r>
-            <a:r>
-              <a:rPr lang="en-US" dirty="0" err="1"/>
-              <a:t>seletor</a:t>
-            </a:r>
-            <a:r>
-              <a:rPr lang="en-US" dirty="0"/>
-              <a:t>)</a:t>
+              <a:t>’)</a:t>
             </a:r>
           </a:p>
           <a:p>
@@ -6204,13 +6211,8 @@
             <a:pPr lvl="1"/>
             <a:r>
               <a:rPr lang="en-US" dirty="0"/>
-              <a:t>Element – the </a:t>
-            </a:r>
-            <a:r>
-              <a:rPr lang="en-US"/>
-              <a:t>base class</a:t>
-            </a:r>
-            <a:endParaRPr lang="en-US" dirty="0"/>
+              <a:t>Element – the base class</a:t>
+            </a:r>
           </a:p>
           <a:p>
             <a:pPr lvl="1"/>
